--- a/customer_segmentation_mckinsey.pptx
+++ b/customer_segmentation_mckinsey.pptx
@@ -3898,7 +3898,7 @@
                 <a:ea typeface="Georgia" pitchFamily="34" charset="-122"/>
                 <a:cs typeface="Georgia" pitchFamily="34" charset="-120"/>
               </a:rPr>
-              <a:t>Eight Strategic Recommendations</a:t>
+              <a:t>Key Findings &amp; Recommendations</a:t>
             </a:r>
             <a:endParaRPr lang="en-US" sz="2600" dirty="0"/>
           </a:p>
@@ -3937,7 +3937,7 @@
                 <a:ea typeface="Calibri" pitchFamily="34" charset="-122"/>
                 <a:cs typeface="Calibri" pitchFamily="34" charset="-120"/>
               </a:rPr>
-              <a:t>Sequenced across three strategic horizons: Protect, Target, Grow</a:t>
+              <a:t>Derived from SQL segmentation analysis across 3,900 customers</a:t>
             </a:r>
             <a:endParaRPr lang="en-US" sz="1200" dirty="0"/>
           </a:p>
@@ -4026,7 +4026,7 @@
                 <a:ea typeface="Calibri" pitchFamily="34" charset="-122"/>
                 <a:cs typeface="Calibri" pitchFamily="34" charset="-120"/>
               </a:rPr>
-              <a:t>H1: Protect Margins</a:t>
+              <a:t>Finding 1: Over-Discounting</a:t>
             </a:r>
             <a:endParaRPr lang="en-US" sz="1050" dirty="0"/>
           </a:p>
@@ -4065,7 +4065,7 @@
                 <a:ea typeface="Calibri" pitchFamily="34" charset="-122"/>
                 <a:cs typeface="Calibri" pitchFamily="34" charset="-120"/>
               </a:rPr>
-              <a:t>Now – 3 months</a:t>
+              <a:t>SQL Queries 1, 3 &amp; 4</a:t>
             </a:r>
             <a:endParaRPr lang="en-US" sz="900" dirty="0"/>
           </a:p>
@@ -4129,7 +4129,7 @@
                 <a:ea typeface="Calibri" pitchFamily="34" charset="-122"/>
                 <a:cs typeface="Calibri" pitchFamily="34" charset="-120"/>
               </a:rPr>
-              <a:t>R1: Remove VIP discounts</a:t>
+              <a:t>Loyal customers: 44% discount rate</a:t>
             </a:r>
             <a:endParaRPr lang="en-US" sz="950" dirty="0"/>
           </a:p>
@@ -4193,7 +4193,7 @@
                 <a:ea typeface="Calibri" pitchFamily="34" charset="-122"/>
                 <a:cs typeface="Calibri" pitchFamily="34" charset="-120"/>
               </a:rPr>
-              <a:t>R2: Targeted discounting</a:t>
+              <a:t>1,145+ high-value, discount-independent customers</a:t>
             </a:r>
             <a:endParaRPr lang="en-US" sz="950" dirty="0"/>
           </a:p>
@@ -4282,7 +4282,7 @@
                 <a:ea typeface="Calibri" pitchFamily="34" charset="-122"/>
                 <a:cs typeface="Calibri" pitchFamily="34" charset="-120"/>
               </a:rPr>
-              <a:t>H2: Target &amp; Personalize</a:t>
+              <a:t>Finding 2: Loyalty ≠ Value</a:t>
             </a:r>
             <a:endParaRPr lang="en-US" sz="1050" dirty="0"/>
           </a:p>
@@ -4321,7 +4321,7 @@
                 <a:ea typeface="Calibri" pitchFamily="34" charset="-122"/>
                 <a:cs typeface="Calibri" pitchFamily="34" charset="-120"/>
               </a:rPr>
-              <a:t>3 – 9 months</a:t>
+              <a:t>SQL Queries 5 &amp; 6</a:t>
             </a:r>
             <a:endParaRPr lang="en-US" sz="900" dirty="0"/>
           </a:p>
@@ -4385,7 +4385,7 @@
                 <a:ea typeface="Calibri" pitchFamily="34" charset="-122"/>
                 <a:cs typeface="Calibri" pitchFamily="34" charset="-120"/>
               </a:rPr>
-              <a:t>R3: Tiered loyalty program</a:t>
+              <a:t>Value tiers split ~33/33/33 within every loyalty tier</a:t>
             </a:r>
             <a:endParaRPr lang="en-US" sz="950" dirty="0"/>
           </a:p>
@@ -4449,7 +4449,7 @@
                 <a:ea typeface="Calibri" pitchFamily="34" charset="-122"/>
                 <a:cs typeface="Calibri" pitchFamily="34" charset="-120"/>
               </a:rPr>
-              <a:t>R4: Personalized marketing</a:t>
+              <a:t>Loyal tier has 887 High-value customers (avg $392)</a:t>
             </a:r>
             <a:endParaRPr lang="en-US" sz="950" dirty="0"/>
           </a:p>
@@ -4513,7 +4513,7 @@
                 <a:ea typeface="Calibri" pitchFamily="34" charset="-122"/>
                 <a:cs typeface="Calibri" pitchFamily="34" charset="-120"/>
               </a:rPr>
-              <a:t>R5: Identify insensitive customers</a:t>
+              <a:t>Targeting must use both dimensions, not loyalty alone</a:t>
             </a:r>
             <a:endParaRPr lang="en-US" sz="950" dirty="0"/>
           </a:p>
@@ -4602,7 +4602,7 @@
                 <a:ea typeface="Calibri" pitchFamily="34" charset="-122"/>
                 <a:cs typeface="Calibri" pitchFamily="34" charset="-120"/>
               </a:rPr>
-              <a:t>H3: Scale &amp; Optimize</a:t>
+              <a:t>Finding 3: Dashboard &amp; Action</a:t>
             </a:r>
             <a:endParaRPr lang="en-US" sz="1050" dirty="0"/>
           </a:p>
@@ -4641,7 +4641,7 @@
                 <a:ea typeface="Calibri" pitchFamily="34" charset="-122"/>
                 <a:cs typeface="Calibri" pitchFamily="34" charset="-120"/>
               </a:rPr>
-              <a:t>9 – 18 months</a:t>
+              <a:t>SQL Queries 6 &amp; 7</a:t>
             </a:r>
             <a:endParaRPr lang="en-US" sz="900" dirty="0"/>
           </a:p>
@@ -4705,7 +4705,7 @@
                 <a:ea typeface="Calibri" pitchFamily="34" charset="-122"/>
                 <a:cs typeface="Calibri" pitchFamily="34" charset="-120"/>
               </a:rPr>
-              <a:t>R6: Value-based alternatives</a:t>
+              <a:t>Rec 4: Shift to value-based incentives</a:t>
             </a:r>
             <a:endParaRPr lang="en-US" sz="950" dirty="0"/>
           </a:p>
@@ -4769,7 +4769,7 @@
                 <a:ea typeface="Calibri" pitchFamily="34" charset="-122"/>
                 <a:cs typeface="Calibri" pitchFamily="34" charset="-120"/>
               </a:rPr>
-              <a:t>R7: A/B testing engine</a:t>
+              <a:t>Rec 5: Build customer value monitoring dashboard</a:t>
             </a:r>
             <a:endParaRPr lang="en-US" sz="950" dirty="0"/>
           </a:p>
@@ -4833,7 +4833,7 @@
                 <a:ea typeface="Calibri" pitchFamily="34" charset="-122"/>
                 <a:cs typeface="Calibri" pitchFamily="34" charset="-120"/>
               </a:rPr>
-              <a:t>R8: Analytics dashboards</a:t>
+              <a:t>Dashboard deployed at streamlit.app</a:t>
             </a:r>
             <a:endParaRPr lang="en-US" sz="950" dirty="0"/>
           </a:p>
@@ -4994,7 +4994,7 @@
                 <a:ea typeface="Calibri" pitchFamily="34" charset="-122"/>
                 <a:cs typeface="Calibri" pitchFamily="34" charset="-120"/>
               </a:rPr>
-              <a:t>R1 &amp; R2  |  H1: PROTECT MARGINS</a:t>
+              <a:t>REC 1 &amp; 2  |  STOP OVER-DISCOUNTING</a:t>
             </a:r>
             <a:endParaRPr lang="en-US" sz="1000" dirty="0"/>
           </a:p>
@@ -5033,7 +5033,7 @@
                 <a:ea typeface="Georgia" pitchFamily="34" charset="-122"/>
                 <a:cs typeface="Georgia" pitchFamily="34" charset="-120"/>
               </a:rPr>
-              <a:t>Eliminate Untargeted Discounts; Shift to Experience-Led Loyalty</a:t>
+              <a:t>Reduce Discounts for Loyal &amp; High-Value Customers; Replace with Experience</a:t>
             </a:r>
             <a:endParaRPr lang="en-US" sz="2200" dirty="0"/>
           </a:p>
@@ -5193,7 +5193,7 @@
                 <a:ea typeface="Calibri" pitchFamily="34" charset="-122"/>
                 <a:cs typeface="Calibri" pitchFamily="34" charset="-120"/>
               </a:rPr>
-              <a:t>Remove Discounts for Loyal &amp; High-Value Customers</a:t>
+              <a:t>Stop Over-Discounting Loyal &amp; High-Value Customers</a:t>
             </a:r>
             <a:endParaRPr lang="en-US" sz="1100" dirty="0"/>
           </a:p>
@@ -5232,7 +5232,7 @@
                 <a:ea typeface="Calibri" pitchFamily="34" charset="-122"/>
                 <a:cs typeface="Calibri" pitchFamily="34" charset="-120"/>
               </a:rPr>
-              <a:t>→  </a:t>
+              <a:t xml:space="preserve">→  </a:t>
             </a:r>
             <a:r>
               <a:rPr lang="en-US" sz="950" dirty="0">
@@ -5243,7 +5243,7 @@
                 <a:ea typeface="Calibri" pitchFamily="34" charset="-122"/>
                 <a:cs typeface="Calibri" pitchFamily="34" charset="-120"/>
               </a:rPr>
-              <a:t>Replace discounts with VIP experiences: early access, free shipping, exclusive events</a:t>
+              <a:t>887 Loyal/High-value customers avg $392 value — receive 43% discount rate they don’t need to convert</a:t>
             </a:r>
             <a:endParaRPr lang="en-US" sz="950" dirty="0"/>
           </a:p>
@@ -5282,7 +5282,7 @@
                 <a:ea typeface="Calibri" pitchFamily="34" charset="-122"/>
                 <a:cs typeface="Calibri" pitchFamily="34" charset="-120"/>
               </a:rPr>
-              <a:t>→  </a:t>
+              <a:t xml:space="preserve">→  </a:t>
             </a:r>
             <a:r>
               <a:rPr lang="en-US" sz="950" dirty="0">
@@ -5293,7 +5293,7 @@
                 <a:ea typeface="Calibri" pitchFamily="34" charset="-122"/>
                 <a:cs typeface="Calibri" pitchFamily="34" charset="-120"/>
               </a:rPr>
-              <a:t>Introduce premium perks that reinforce brand status rather than transactional value</a:t>
+              <a:t>Gradually reduce discounts for this cohort; replace with non-monetary rewards — early access to new collections, exclusive product drops, free express shipping</a:t>
             </a:r>
             <a:endParaRPr lang="en-US" sz="950" dirty="0"/>
           </a:p>
@@ -5332,7 +5332,7 @@
                 <a:ea typeface="Calibri" pitchFamily="34" charset="-122"/>
                 <a:cs typeface="Calibri" pitchFamily="34" charset="-120"/>
               </a:rPr>
-              <a:t>→  </a:t>
+              <a:t xml:space="preserve">→  </a:t>
             </a:r>
             <a:r>
               <a:rPr lang="en-US" sz="950" dirty="0">
@@ -5343,7 +5343,7 @@
                 <a:ea typeface="Calibri" pitchFamily="34" charset="-122"/>
                 <a:cs typeface="Calibri" pitchFamily="34" charset="-120"/>
               </a:rPr>
-              <a:t>Communicate tier benefits clearly to manage customer expectations</a:t>
+              <a:t>Communicate tier benefits clearly so customers understand what replaces the discount</a:t>
             </a:r>
             <a:endParaRPr lang="en-US" sz="950" dirty="0"/>
           </a:p>
@@ -5407,7 +5407,7 @@
                 <a:ea typeface="Calibri" pitchFamily="34" charset="-122"/>
                 <a:cs typeface="Calibri" pitchFamily="34" charset="-120"/>
               </a:rPr>
-              <a:t>▶  +4–7pp gross margin improvement on VIP cohort within 6 months</a:t>
+              <a:t>▶  1,145 high-value, discount-independent customers identified — immediate margin recovery with zero revenue risk</a:t>
             </a:r>
             <a:endParaRPr lang="en-US" sz="900" dirty="0"/>
           </a:p>
@@ -5567,7 +5567,7 @@
                 <a:ea typeface="Calibri" pitchFamily="34" charset="-122"/>
                 <a:cs typeface="Calibri" pitchFamily="34" charset="-120"/>
               </a:rPr>
-              <a:t>Implement Targeted Discounting by Segment</a:t>
+              <a:t>Introduce Targeted Discounting by Segment</a:t>
             </a:r>
             <a:endParaRPr lang="en-US" sz="1100" dirty="0"/>
           </a:p>
@@ -5606,7 +5606,7 @@
                 <a:ea typeface="Calibri" pitchFamily="34" charset="-122"/>
                 <a:cs typeface="Calibri" pitchFamily="34" charset="-120"/>
               </a:rPr>
-              <a:t>→  </a:t>
+              <a:t xml:space="preserve">→  </a:t>
             </a:r>
             <a:r>
               <a:rPr lang="en-US" sz="950" dirty="0">
@@ -5617,7 +5617,7 @@
                 <a:ea typeface="Calibri" pitchFamily="34" charset="-122"/>
                 <a:cs typeface="Calibri" pitchFamily="34" charset="-120"/>
               </a:rPr>
-              <a:t>New customers: time-limited onboarding offers to drive first repeat purchase</a:t>
+              <a:t>New customers (424 total, avg value $142): onboarding discounts to drive first repeat purchase</a:t>
             </a:r>
             <a:endParaRPr lang="en-US" sz="950" dirty="0"/>
           </a:p>
@@ -5656,7 +5656,7 @@
                 <a:ea typeface="Calibri" pitchFamily="34" charset="-122"/>
                 <a:cs typeface="Calibri" pitchFamily="34" charset="-120"/>
               </a:rPr>
-              <a:t>→  </a:t>
+              <a:t xml:space="preserve">→  </a:t>
             </a:r>
             <a:r>
               <a:rPr lang="en-US" sz="950" dirty="0">
@@ -5667,7 +5667,7 @@
                 <a:ea typeface="Calibri" pitchFamily="34" charset="-122"/>
                 <a:cs typeface="Calibri" pitchFamily="34" charset="-120"/>
               </a:rPr>
-              <a:t>Low-value segments: incentives tied to minimum basket thresholds</a:t>
+              <a:t>Low-value / price-sensitive customers: targeted promotions tied to minimum basket size to drive spend uplift</a:t>
             </a:r>
             <a:endParaRPr lang="en-US" sz="950" dirty="0"/>
           </a:p>
@@ -5706,7 +5706,7 @@
                 <a:ea typeface="Calibri" pitchFamily="34" charset="-122"/>
                 <a:cs typeface="Calibri" pitchFamily="34" charset="-120"/>
               </a:rPr>
-              <a:t>→  </a:t>
+              <a:t xml:space="preserve">→  </a:t>
             </a:r>
             <a:r>
               <a:rPr lang="en-US" sz="950" dirty="0">
@@ -5717,7 +5717,7 @@
                 <a:ea typeface="Calibri" pitchFamily="34" charset="-122"/>
                 <a:cs typeface="Calibri" pitchFamily="34" charset="-120"/>
               </a:rPr>
-              <a:t>Returning/lapsed customers: reactivation offers with behavioral triggers</a:t>
+              <a:t>Returning/lapsed customers (755 total, avg value $202): reactivation offers with behavioral triggers</a:t>
             </a:r>
             <a:endParaRPr lang="en-US" sz="950" dirty="0"/>
           </a:p>
@@ -5781,7 +5781,7 @@
                 <a:ea typeface="Calibri" pitchFamily="34" charset="-122"/>
                 <a:cs typeface="Calibri" pitchFamily="34" charset="-120"/>
               </a:rPr>
-              <a:t>▶  20–35% reduction in promotional cost-per-acquisition</a:t>
+              <a:t>▶  Discount rate gap between New (40%) and Loyal (44%) is only 4pp — precision targeting can unlock significant margin improvement</a:t>
             </a:r>
             <a:endParaRPr lang="en-US" sz="900" dirty="0"/>
           </a:p>
@@ -5942,7 +5942,7 @@
                 <a:ea typeface="Calibri" pitchFamily="34" charset="-122"/>
                 <a:cs typeface="Calibri" pitchFamily="34" charset="-120"/>
               </a:rPr>
-              <a:t>R3  |  H2: TARGET &amp; PERSONALIZE</a:t>
+              <a:t>REC 3  |  PERSONALIZE BY SEGMENT</a:t>
             </a:r>
             <a:endParaRPr lang="en-US" sz="1000" dirty="0"/>
           </a:p>
@@ -5981,7 +5981,7 @@
                 <a:ea typeface="Georgia" pitchFamily="34" charset="-122"/>
                 <a:cs typeface="Georgia" pitchFamily="34" charset="-120"/>
               </a:rPr>
-              <a:t>Design a Three-Tier Loyalty Architecture</a:t>
+              <a:t>Personalize Marketing Based on Customer Segments</a:t>
             </a:r>
             <a:endParaRPr lang="en-US" sz="2200" dirty="0"/>
           </a:p>
@@ -6020,7 +6020,7 @@
                 <a:ea typeface="Calibri" pitchFamily="34" charset="-122"/>
                 <a:cs typeface="Calibri" pitchFamily="34" charset="-120"/>
               </a:rPr>
-              <a:t>Structured progression encourages cross-tier migration and reduces discount dependency</a:t>
+              <a:t>Loyalty and value are independent dimensions — targeting must use both to be effective</a:t>
             </a:r>
             <a:endParaRPr lang="en-US" sz="1100" dirty="0"/>
           </a:p>
@@ -6140,7 +6140,7 @@
                 <a:ea typeface="Georgia" pitchFamily="34" charset="-122"/>
                 <a:cs typeface="Georgia" pitchFamily="34" charset="-120"/>
               </a:rPr>
-              <a:t>Bronze</a:t>
+              <a:t>New Customers</a:t>
             </a:r>
             <a:endParaRPr lang="en-US" sz="1800" dirty="0"/>
           </a:p>
@@ -6218,7 +6218,7 @@
                 <a:ea typeface="Calibri" pitchFamily="34" charset="-122"/>
                 <a:cs typeface="Calibri" pitchFamily="34" charset="-120"/>
               </a:rPr>
-              <a:t>New &amp; low-frequency shoppers</a:t>
+              <a:t>424 customers · Avg value $142</a:t>
             </a:r>
             <a:endParaRPr lang="en-US" sz="1000" dirty="0"/>
           </a:p>
@@ -6321,7 +6321,7 @@
                 <a:ea typeface="Calibri" pitchFamily="34" charset="-122"/>
                 <a:cs typeface="Calibri" pitchFamily="34" charset="-120"/>
               </a:rPr>
-              <a:t>✓  </a:t>
+              <a:t xml:space="preserve">✓  </a:t>
             </a:r>
             <a:r>
               <a:rPr lang="en-US" sz="950" dirty="0">
@@ -6332,7 +6332,7 @@
                 <a:ea typeface="Calibri" pitchFamily="34" charset="-122"/>
                 <a:cs typeface="Calibri" pitchFamily="34" charset="-120"/>
               </a:rPr>
-              <a:t>Entry-level discounts (5–10%)</a:t>
+              <a:t>Onboarding discounts to drive first repeat purchase</a:t>
             </a:r>
             <a:endParaRPr lang="en-US" sz="950" dirty="0"/>
           </a:p>
@@ -6371,7 +6371,7 @@
                 <a:ea typeface="Calibri" pitchFamily="34" charset="-122"/>
                 <a:cs typeface="Calibri" pitchFamily="34" charset="-120"/>
               </a:rPr>
-              <a:t>✓  </a:t>
+              <a:t xml:space="preserve">✓  </a:t>
             </a:r>
             <a:r>
               <a:rPr lang="en-US" sz="950" dirty="0">
@@ -6382,7 +6382,7 @@
                 <a:ea typeface="Calibri" pitchFamily="34" charset="-122"/>
                 <a:cs typeface="Calibri" pitchFamily="34" charset="-120"/>
               </a:rPr>
-              <a:t>Birthday offers</a:t>
+              <a:t>Deal-focused messaging and category promotions</a:t>
             </a:r>
             <a:endParaRPr lang="en-US" sz="950" dirty="0"/>
           </a:p>
@@ -6421,7 +6421,7 @@
                 <a:ea typeface="Calibri" pitchFamily="34" charset="-122"/>
                 <a:cs typeface="Calibri" pitchFamily="34" charset="-120"/>
               </a:rPr>
-              <a:t>✓  </a:t>
+              <a:t xml:space="preserve">✓  </a:t>
             </a:r>
             <a:r>
               <a:rPr lang="en-US" sz="950" dirty="0">
@@ -6432,7 +6432,7 @@
                 <a:ea typeface="Calibri" pitchFamily="34" charset="-122"/>
                 <a:cs typeface="Calibri" pitchFamily="34" charset="-120"/>
               </a:rPr>
-              <a:t>Member pricing on sale items</a:t>
+              <a:t>Basket-threshold incentives to increase order value</a:t>
             </a:r>
             <a:endParaRPr lang="en-US" sz="950" dirty="0"/>
           </a:p>
@@ -6552,7 +6552,7 @@
                 <a:ea typeface="Georgia" pitchFamily="34" charset="-122"/>
                 <a:cs typeface="Georgia" pitchFamily="34" charset="-120"/>
               </a:rPr>
-              <a:t>Silver</a:t>
+              <a:t>Returning Customers</a:t>
             </a:r>
             <a:endParaRPr lang="en-US" sz="1800" dirty="0"/>
           </a:p>
@@ -6630,7 +6630,7 @@
                 <a:ea typeface="Calibri" pitchFamily="34" charset="-122"/>
                 <a:cs typeface="Calibri" pitchFamily="34" charset="-120"/>
               </a:rPr>
-              <a:t>Repeat purchasers, mid-value</a:t>
+              <a:t>755 customers · Avg value $202</a:t>
             </a:r>
             <a:endParaRPr lang="en-US" sz="1000" dirty="0"/>
           </a:p>
@@ -6733,7 +6733,7 @@
                 <a:ea typeface="Calibri" pitchFamily="34" charset="-122"/>
                 <a:cs typeface="Calibri" pitchFamily="34" charset="-120"/>
               </a:rPr>
-              <a:t>✓  </a:t>
+              <a:t xml:space="preserve">✓  </a:t>
             </a:r>
             <a:r>
               <a:rPr lang="en-US" sz="950" dirty="0">
@@ -6744,7 +6744,7 @@
                 <a:ea typeface="Calibri" pitchFamily="34" charset="-122"/>
                 <a:cs typeface="Calibri" pitchFamily="34" charset="-120"/>
               </a:rPr>
-              <a:t>Priority customer service</a:t>
+              <a:t>Reactivation offers with behavioural triggers</a:t>
             </a:r>
             <a:endParaRPr lang="en-US" sz="950" dirty="0"/>
           </a:p>
@@ -6783,7 +6783,7 @@
                 <a:ea typeface="Calibri" pitchFamily="34" charset="-122"/>
                 <a:cs typeface="Calibri" pitchFamily="34" charset="-120"/>
               </a:rPr>
-              <a:t>✓  </a:t>
+              <a:t xml:space="preserve">✓  </a:t>
             </a:r>
             <a:r>
               <a:rPr lang="en-US" sz="950" dirty="0">
@@ -6794,7 +6794,7 @@
                 <a:ea typeface="Calibri" pitchFamily="34" charset="-122"/>
                 <a:cs typeface="Calibri" pitchFamily="34" charset="-120"/>
               </a:rPr>
-              <a:t>Free standard shipping</a:t>
+              <a:t>Loyalty points redeemable for store credit</a:t>
             </a:r>
             <a:endParaRPr lang="en-US" sz="950" dirty="0"/>
           </a:p>
@@ -6833,7 +6833,7 @@
                 <a:ea typeface="Calibri" pitchFamily="34" charset="-122"/>
                 <a:cs typeface="Calibri" pitchFamily="34" charset="-120"/>
               </a:rPr>
-              <a:t>✓  </a:t>
+              <a:t xml:space="preserve">✓  </a:t>
             </a:r>
             <a:r>
               <a:rPr lang="en-US" sz="950" dirty="0">
@@ -6844,7 +6844,7 @@
                 <a:ea typeface="Calibri" pitchFamily="34" charset="-122"/>
                 <a:cs typeface="Calibri" pitchFamily="34" charset="-120"/>
               </a:rPr>
-              <a:t>Early sale access (24hrs)</a:t>
+              <a:t>Personalised product recommendations by category</a:t>
             </a:r>
             <a:endParaRPr lang="en-US" sz="950" dirty="0"/>
           </a:p>
@@ -6964,7 +6964,7 @@
                 <a:ea typeface="Georgia" pitchFamily="34" charset="-122"/>
                 <a:cs typeface="Georgia" pitchFamily="34" charset="-120"/>
               </a:rPr>
-              <a:t>Gold</a:t>
+              <a:t>Loyal Customers</a:t>
             </a:r>
             <a:endParaRPr lang="en-US" sz="1800" dirty="0"/>
           </a:p>
@@ -7042,7 +7042,7 @@
                 <a:ea typeface="Calibri" pitchFamily="34" charset="-122"/>
                 <a:cs typeface="Calibri" pitchFamily="34" charset="-120"/>
               </a:rPr>
-              <a:t>High-value, brand advocates</a:t>
+              <a:t>2,721 customers · Avg value $268</a:t>
             </a:r>
             <a:endParaRPr lang="en-US" sz="1000" dirty="0"/>
           </a:p>
@@ -7145,7 +7145,7 @@
                 <a:ea typeface="Calibri" pitchFamily="34" charset="-122"/>
                 <a:cs typeface="Calibri" pitchFamily="34" charset="-120"/>
               </a:rPr>
-              <a:t>✓  </a:t>
+              <a:t xml:space="preserve">✓  </a:t>
             </a:r>
             <a:r>
               <a:rPr lang="en-US" sz="950" dirty="0">
@@ -7156,7 +7156,7 @@
                 <a:ea typeface="Calibri" pitchFamily="34" charset="-122"/>
                 <a:cs typeface="Calibri" pitchFamily="34" charset="-120"/>
               </a:rPr>
-              <a:t>Exclusive product drops</a:t>
+              <a:t>Exclusive product drops and early collection access</a:t>
             </a:r>
             <a:endParaRPr lang="en-US" sz="950" dirty="0"/>
           </a:p>
@@ -7195,7 +7195,7 @@
                 <a:ea typeface="Calibri" pitchFamily="34" charset="-122"/>
                 <a:cs typeface="Calibri" pitchFamily="34" charset="-120"/>
               </a:rPr>
-              <a:t>✓  </a:t>
+              <a:t xml:space="preserve">✓  </a:t>
             </a:r>
             <a:r>
               <a:rPr lang="en-US" sz="950" dirty="0">
@@ -7206,7 +7206,7 @@
                 <a:ea typeface="Calibri" pitchFamily="34" charset="-122"/>
                 <a:cs typeface="Calibri" pitchFamily="34" charset="-120"/>
               </a:rPr>
-              <a:t>Personal stylist sessions</a:t>
+              <a:t>Free express shipping as standard</a:t>
             </a:r>
             <a:endParaRPr lang="en-US" sz="950" dirty="0"/>
           </a:p>
@@ -7245,7 +7245,7 @@
                 <a:ea typeface="Calibri" pitchFamily="34" charset="-122"/>
                 <a:cs typeface="Calibri" pitchFamily="34" charset="-120"/>
               </a:rPr>
-              <a:t>✓  </a:t>
+              <a:t xml:space="preserve">✓  </a:t>
             </a:r>
             <a:r>
               <a:rPr lang="en-US" sz="950" dirty="0">
@@ -7256,7 +7256,7 @@
                 <a:ea typeface="Calibri" pitchFamily="34" charset="-122"/>
                 <a:cs typeface="Calibri" pitchFamily="34" charset="-120"/>
               </a:rPr>
-              <a:t>VIP event invitations</a:t>
+              <a:t>Premium experiences: styling sessions, VIP events</a:t>
             </a:r>
             <a:endParaRPr lang="en-US" sz="950" dirty="0"/>
           </a:p>
@@ -7545,7 +7545,7 @@
                 <a:ea typeface="Calibri" pitchFamily="34" charset="-122"/>
                 <a:cs typeface="Calibri" pitchFamily="34" charset="-120"/>
               </a:rPr>
-              <a:t>R4 &amp; R5  |  H2: TARGET &amp; PERSONALIZE</a:t>
+              <a:t>REC 3 &amp; 4  |  PERSONALIZE &amp; PROTECT MARGIN</a:t>
             </a:r>
             <a:endParaRPr lang="en-US" sz="1000" dirty="0"/>
           </a:p>
@@ -7584,7 +7584,7 @@
                 <a:ea typeface="Georgia" pitchFamily="34" charset="-122"/>
                 <a:cs typeface="Georgia" pitchFamily="34" charset="-120"/>
               </a:rPr>
-              <a:t>Personalize Every Touchpoint; Identify Discount-Insensitive Customers</a:t>
+              <a:t>Personalize Every Touchpoint; Protect Margin on Discount-Independent Segments</a:t>
             </a:r>
             <a:endParaRPr lang="en-US" sz="2000" dirty="0"/>
           </a:p>
@@ -7744,7 +7744,7 @@
                 <a:ea typeface="Calibri" pitchFamily="34" charset="-122"/>
                 <a:cs typeface="Calibri" pitchFamily="34" charset="-120"/>
               </a:rPr>
-              <a:t>Personalized Marketing at Scale</a:t>
+              <a:t>Personalize Marketing by Customer Segment</a:t>
             </a:r>
             <a:endParaRPr lang="en-US" sz="1200" dirty="0"/>
           </a:p>
@@ -7832,7 +7832,7 @@
                 <a:ea typeface="Calibri" pitchFamily="34" charset="-122"/>
                 <a:cs typeface="Calibri" pitchFamily="34" charset="-120"/>
               </a:rPr>
-              <a:t>Segment-specific email journeys with dynamic content blocks per customer tier</a:t>
+              <a:t>High-value customers (avg $392): premium product recommendations, VIP experiences, no discounts</a:t>
             </a:r>
             <a:endParaRPr lang="en-US" sz="1000" dirty="0"/>
           </a:p>
@@ -7920,7 +7920,7 @@
                 <a:ea typeface="Calibri" pitchFamily="34" charset="-122"/>
                 <a:cs typeface="Calibri" pitchFamily="34" charset="-120"/>
               </a:rPr>
-              <a:t>AI-powered product recommendations based on browsing and purchase history</a:t>
+              <a:t>Discount-sensitive customers: deal-focused messaging and targeted promotions tied to basket thresholds</a:t>
             </a:r>
             <a:endParaRPr lang="en-US" sz="1000" dirty="0"/>
           </a:p>
@@ -8008,7 +8008,7 @@
                 <a:ea typeface="Calibri" pitchFamily="34" charset="-122"/>
                 <a:cs typeface="Calibri" pitchFamily="34" charset="-120"/>
               </a:rPr>
-              <a:t>Behavior-triggered push notifications: cart abandonment, wishlist drops, restock alerts</a:t>
+              <a:t>Category-specific buyers: tailored product suggestions based on Footwear, Clothing, Accessories, Outerwear behaviour</a:t>
             </a:r>
             <a:endParaRPr lang="en-US" sz="1000" dirty="0"/>
           </a:p>
@@ -8072,7 +8072,7 @@
                 <a:ea typeface="Calibri" pitchFamily="34" charset="-122"/>
                 <a:cs typeface="Calibri" pitchFamily="34" charset="-120"/>
               </a:rPr>
-              <a:t>▶  Expected: 2–4× improvement in email CTR vs. batch campaigns</a:t>
+              <a:t>▶  All 4 product categories show near-identical avg value ($228–$244) — category is not a value predictor; segment tier is</a:t>
             </a:r>
             <a:endParaRPr lang="en-US" sz="900" dirty="0"/>
           </a:p>
@@ -8232,7 +8232,7 @@
                 <a:ea typeface="Calibri" pitchFamily="34" charset="-122"/>
                 <a:cs typeface="Calibri" pitchFamily="34" charset="-120"/>
               </a:rPr>
-              <a:t>Identify Discount-Insensitive Customers</a:t>
+              <a:t>Act on Discount-Independent Segments Immediately</a:t>
             </a:r>
             <a:endParaRPr lang="en-US" sz="1200" dirty="0"/>
           </a:p>
@@ -8335,7 +8335,7 @@
                 <a:ea typeface="Calibri" pitchFamily="34" charset="-122"/>
                 <a:cs typeface="Calibri" pitchFamily="34" charset="-120"/>
               </a:rPr>
-              <a:t>Model purchase probability with and without discount — isolate customers who buy regardless</a:t>
+              <a:t>SQL analysis identified segments with above-avg value AND below-avg discount usage: Loyal/High (887 customers, $392 avg, 43% disc. rate) and Returning/High (258 customers, $297 avg, 43% disc. rate)</a:t>
             </a:r>
             <a:endParaRPr lang="en-US" sz="1000" dirty="0"/>
           </a:p>
@@ -8438,7 +8438,7 @@
                 <a:ea typeface="Calibri" pitchFamily="34" charset="-122"/>
                 <a:cs typeface="Calibri" pitchFamily="34" charset="-120"/>
               </a:rPr>
-              <a:t>Reduce or remove promotional spend on this cohort; redirect budget to acquisition</a:t>
+              <a:t>Run a 90-day pilot: remove discounts for these 1,145 customers, replace with experience-led perks (early access, free shipping). Monitor retention and revenue weekly</a:t>
             </a:r>
             <a:endParaRPr lang="en-US" sz="1000" dirty="0"/>
           </a:p>
@@ -8541,7 +8541,7 @@
                 <a:ea typeface="Calibri" pitchFamily="34" charset="-122"/>
                 <a:cs typeface="Calibri" pitchFamily="34" charset="-120"/>
               </a:rPr>
-              <a:t>Monitor 90-day retention and revenue impact; course-correct if churn increases</a:t>
+              <a:t>Segments least sensitive to discount removal (SQL Query 7): New/High ($205 avg, 38% disc. rate) and Returning/Low ($110 avg, 39% disc. rate) — second wave of pilot candidates</a:t>
             </a:r>
             <a:endParaRPr lang="en-US" sz="1000" dirty="0"/>
           </a:p>
@@ -8605,7 +8605,7 @@
                 <a:ea typeface="Calibri" pitchFamily="34" charset="-122"/>
                 <a:cs typeface="Calibri" pitchFamily="34" charset="-120"/>
               </a:rPr>
-              <a:t>▶  Expected: 8–12% reduction in unnecessary promo cost</a:t>
+              <a:t>▶  1,145 high-value customers identified for immediate pilot — zero revenue risk, direct margin improvement</a:t>
             </a:r>
             <a:endParaRPr lang="en-US" sz="900" dirty="0"/>
           </a:p>
@@ -8766,7 +8766,7 @@
                 <a:ea typeface="Calibri" pitchFamily="34" charset="-122"/>
                 <a:cs typeface="Calibri" pitchFamily="34" charset="-120"/>
               </a:rPr>
-              <a:t>R6, R7 &amp; R8  |  H3: SCALE &amp; OPTIMIZE</a:t>
+              <a:t>REC 4 &amp; 5  |  VALUE-BASED INCENTIVES &amp; MONITORING</a:t>
             </a:r>
             <a:endParaRPr lang="en-US" sz="1000" dirty="0"/>
           </a:p>
@@ -8805,7 +8805,7 @@
                 <a:ea typeface="Georgia" pitchFamily="34" charset="-122"/>
                 <a:cs typeface="Georgia" pitchFamily="34" charset="-120"/>
               </a:rPr>
-              <a:t>Replace Discounts with Value; Build the Experimentation &amp; Intelligence Engine</a:t>
+              <a:t>Shift from Discounts to Value-Based Incentives; Build a Customer Monitoring Dashboard</a:t>
             </a:r>
             <a:endParaRPr lang="en-US" sz="1900" dirty="0"/>
           </a:p>
@@ -8965,7 +8965,7 @@
                 <a:ea typeface="Calibri" pitchFamily="34" charset="-122"/>
                 <a:cs typeface="Calibri" pitchFamily="34" charset="-120"/>
               </a:rPr>
-              <a:t>Replace Discounts with Value</a:t>
+              <a:t>Shift from Discounts to Value-Based Incentives</a:t>
             </a:r>
             <a:endParaRPr lang="en-US" sz="1000" dirty="0"/>
           </a:p>
@@ -9004,7 +9004,7 @@
                 <a:ea typeface="Calibri" pitchFamily="34" charset="-122"/>
                 <a:cs typeface="Calibri" pitchFamily="34" charset="-120"/>
               </a:rPr>
-              <a:t>→  </a:t>
+              <a:t xml:space="preserve">→  </a:t>
             </a:r>
             <a:r>
               <a:rPr lang="en-US" sz="900" dirty="0">
@@ -9015,7 +9015,7 @@
                 <a:ea typeface="Calibri" pitchFamily="34" charset="-122"/>
                 <a:cs typeface="Calibri" pitchFamily="34" charset="-120"/>
               </a:rPr>
-              <a:t>Product bundles at marginal cost uplift — perceived value &gt; discount depth</a:t>
+              <a:t>Bundled offers, loyalty points, and personalised recommendations replace cash discounts for high-value segments</a:t>
             </a:r>
             <a:endParaRPr lang="en-US" sz="900" dirty="0"/>
           </a:p>
@@ -9054,7 +9054,7 @@
                 <a:ea typeface="Calibri" pitchFamily="34" charset="-122"/>
                 <a:cs typeface="Calibri" pitchFamily="34" charset="-120"/>
               </a:rPr>
-              <a:t>→  </a:t>
+              <a:t xml:space="preserve">→  </a:t>
             </a:r>
             <a:r>
               <a:rPr lang="en-US" sz="900" dirty="0">
@@ -9065,7 +9065,7 @@
                 <a:ea typeface="Calibri" pitchFamily="34" charset="-122"/>
                 <a:cs typeface="Calibri" pitchFamily="34" charset="-120"/>
               </a:rPr>
-              <a:t>Loyalty points redeemable for store credit, not cash-equivalent discounts</a:t>
+              <a:t>Loyalty points redeemable for store credit — builds retention without eroding margin</a:t>
             </a:r>
             <a:endParaRPr lang="en-US" sz="900" dirty="0"/>
           </a:p>
@@ -9104,7 +9104,7 @@
                 <a:ea typeface="Calibri" pitchFamily="34" charset="-122"/>
                 <a:cs typeface="Calibri" pitchFamily="34" charset="-120"/>
               </a:rPr>
-              <a:t>→  </a:t>
+              <a:t xml:space="preserve">→  </a:t>
             </a:r>
             <a:r>
               <a:rPr lang="en-US" sz="900" dirty="0">
@@ -9115,7 +9115,7 @@
                 <a:ea typeface="Calibri" pitchFamily="34" charset="-122"/>
                 <a:cs typeface="Calibri" pitchFamily="34" charset="-120"/>
               </a:rPr>
-              <a:t>Premium experiences: styling sessions, events, members-only drops</a:t>
+              <a:t>Premium experiences for Loyal/High-value customers: styling sessions, members-only drops, VIP events</a:t>
             </a:r>
             <a:endParaRPr lang="en-US" sz="900" dirty="0"/>
           </a:p>
@@ -9179,7 +9179,7 @@
                 <a:ea typeface="Calibri" pitchFamily="34" charset="-122"/>
                 <a:cs typeface="Calibri" pitchFamily="34" charset="-120"/>
               </a:rPr>
-              <a:t>▶  Net margin lift of 3–5pp on redeemed value vs. equivalent discount</a:t>
+              <a:t>▶  Subscribers show higher avg value than non-subscribers across all tiers — subscription is the retention model that works; scale it</a:t>
             </a:r>
             <a:endParaRPr lang="en-US" sz="850" dirty="0"/>
           </a:p>
@@ -9339,7 +9339,7 @@
                 <a:ea typeface="Calibri" pitchFamily="34" charset="-122"/>
                 <a:cs typeface="Calibri" pitchFamily="34" charset="-120"/>
               </a:rPr>
-              <a:t>Deploy A/B Testing Engine</a:t>
+              <a:t>Build a Customer Value Monitoring Dashboard</a:t>
             </a:r>
             <a:endParaRPr lang="en-US" sz="1000" dirty="0"/>
           </a:p>
@@ -9378,7 +9378,7 @@
                 <a:ea typeface="Calibri" pitchFamily="34" charset="-122"/>
                 <a:cs typeface="Calibri" pitchFamily="34" charset="-120"/>
               </a:rPr>
-              <a:t>→  </a:t>
+              <a:t xml:space="preserve">→  </a:t>
             </a:r>
             <a:r>
               <a:rPr lang="en-US" sz="900" dirty="0">
@@ -9389,7 +9389,7 @@
                 <a:ea typeface="Calibri" pitchFamily="34" charset="-122"/>
                 <a:cs typeface="Calibri" pitchFamily="34" charset="-120"/>
               </a:rPr>
-              <a:t>Systematically test discount vs. no-discount for matched customer pairs</a:t>
+              <a:t>Live Streamlit dashboard deployed — tracks Total Customers, Total Proxied CLV, Avg Discount Rate, Retention Rate, and Avg Customer Value Score</a:t>
             </a:r>
             <a:endParaRPr lang="en-US" sz="900" dirty="0"/>
           </a:p>
@@ -9428,7 +9428,7 @@
                 <a:ea typeface="Calibri" pitchFamily="34" charset="-122"/>
                 <a:cs typeface="Calibri" pitchFamily="34" charset="-120"/>
               </a:rPr>
-              <a:t>→  </a:t>
+              <a:t xml:space="preserve">→  </a:t>
             </a:r>
             <a:r>
               <a:rPr lang="en-US" sz="900" dirty="0">
@@ -9439,7 +9439,7 @@
                 <a:ea typeface="Calibri" pitchFamily="34" charset="-122"/>
                 <a:cs typeface="Calibri" pitchFamily="34" charset="-120"/>
               </a:rPr>
-              <a:t>Measure conversion rate, basket size, and 30/60/90-day repeat purchase</a:t>
+              <a:t>Filter by loyalty tier, value tier, category, and subscription status — enables segment-level decision making for CRM and marketing teams</a:t>
             </a:r>
             <a:endParaRPr lang="en-US" sz="900" dirty="0"/>
           </a:p>
@@ -9478,7 +9478,7 @@
                 <a:ea typeface="Calibri" pitchFamily="34" charset="-122"/>
                 <a:cs typeface="Calibri" pitchFamily="34" charset="-120"/>
               </a:rPr>
-              <a:t>→  </a:t>
+              <a:t xml:space="preserve">→  </a:t>
             </a:r>
             <a:r>
               <a:rPr lang="en-US" sz="900" dirty="0">
@@ -9489,7 +9489,7 @@
                 <a:ea typeface="Calibri" pitchFamily="34" charset="-122"/>
                 <a:cs typeface="Calibri" pitchFamily="34" charset="-120"/>
               </a:rPr>
-              <a:t>Iterate and roll out winning variants across customer segments quarterly</a:t>
+              <a:t>Surfaces discount-independent high-value segments dynamically — flags margin recovery opportunities as filters change</a:t>
             </a:r>
             <a:endParaRPr lang="en-US" sz="900" dirty="0"/>
           </a:p>
@@ -9553,7 +9553,7 @@
                 <a:ea typeface="Calibri" pitchFamily="34" charset="-122"/>
                 <a:cs typeface="Calibri" pitchFamily="34" charset="-120"/>
               </a:rPr>
-              <a:t>▶  Builds proprietary data moat on price elasticity by segment</a:t>
+              <a:t>▶  Dashboard live at streamlit.app — enables weekly data-driven decisions for commercial and CRM teams</a:t>
             </a:r>
             <a:endParaRPr lang="en-US" sz="850" dirty="0"/>
           </a:p>
@@ -9713,7 +9713,7 @@
                 <a:ea typeface="Calibri" pitchFamily="34" charset="-122"/>
                 <a:cs typeface="Calibri" pitchFamily="34" charset="-120"/>
               </a:rPr>
-              <a:t>Build Real-Time Analytics Dashboards</a:t>
+              <a:t>Next Steps: Simulate &amp; Scale</a:t>
             </a:r>
             <a:endParaRPr lang="en-US" sz="1000" dirty="0"/>
           </a:p>
@@ -9752,7 +9752,7 @@
                 <a:ea typeface="Calibri" pitchFamily="34" charset="-122"/>
                 <a:cs typeface="Calibri" pitchFamily="34" charset="-120"/>
               </a:rPr>
-              <a:t>→  </a:t>
+              <a:t xml:space="preserve">→  </a:t>
             </a:r>
             <a:r>
               <a:rPr lang="en-US" sz="900" dirty="0">
@@ -9763,7 +9763,7 @@
                 <a:ea typeface="Calibri" pitchFamily="34" charset="-122"/>
                 <a:cs typeface="Calibri" pitchFamily="34" charset="-120"/>
               </a:rPr>
-              <a:t>Track LTV, retention rates, and discount utilization by segment in real time</a:t>
+              <a:t>Commission 90-day pilot on Loyal/High-value cohort (887 customers) — remove discounts, replace with experience perks, track retention and revenue weekly</a:t>
             </a:r>
             <a:endParaRPr lang="en-US" sz="900" dirty="0"/>
           </a:p>
@@ -9802,7 +9802,7 @@
                 <a:ea typeface="Calibri" pitchFamily="34" charset="-122"/>
                 <a:cs typeface="Calibri" pitchFamily="34" charset="-120"/>
               </a:rPr>
-              <a:t>→  </a:t>
+              <a:t xml:space="preserve">→  </a:t>
             </a:r>
             <a:r>
               <a:rPr lang="en-US" sz="900" dirty="0">
@@ -9813,7 +9813,7 @@
                 <a:ea typeface="Calibri" pitchFamily="34" charset="-122"/>
                 <a:cs typeface="Calibri" pitchFamily="34" charset="-120"/>
               </a:rPr>
-              <a:t>Flag cohorts at risk of churn before promotional windows close</a:t>
+              <a:t>Simulate discount reduction scenarios on full customer base to model revenue impact before full rollout</a:t>
             </a:r>
             <a:endParaRPr lang="en-US" sz="900" dirty="0"/>
           </a:p>
@@ -9852,7 +9852,7 @@
                 <a:ea typeface="Calibri" pitchFamily="34" charset="-122"/>
                 <a:cs typeface="Calibri" pitchFamily="34" charset="-120"/>
               </a:rPr>
-              <a:t>→  </a:t>
+              <a:t xml:space="preserve">→  </a:t>
             </a:r>
             <a:r>
               <a:rPr lang="en-US" sz="900" dirty="0">
@@ -9863,7 +9863,7 @@
                 <a:ea typeface="Calibri" pitchFamily="34" charset="-122"/>
                 <a:cs typeface="Calibri" pitchFamily="34" charset="-120"/>
               </a:rPr>
-              <a:t>Enable weekly data-driven decisions for commercial and CRM teams</a:t>
+              <a:t>Add recommendation engine slides for executive audience and extend dashboard with A/B test result tracking</a:t>
             </a:r>
             <a:endParaRPr lang="en-US" sz="900" dirty="0"/>
           </a:p>
@@ -9927,7 +9927,7 @@
                 <a:ea typeface="Calibri" pitchFamily="34" charset="-122"/>
                 <a:cs typeface="Calibri" pitchFamily="34" charset="-120"/>
               </a:rPr>
-              <a:t>▶  Reduces decision lag from weeks to hours; democratizes insight access</a:t>
+              <a:t>▶  Pilot → Simulate → Scale: three-step path to a fully personalised, margin-accretive customer engagement strategy</a:t>
             </a:r>
             <a:endParaRPr lang="en-US" sz="850" dirty="0"/>
           </a:p>
@@ -10166,7 +10166,7 @@
                 <a:ea typeface="Calibri" pitchFamily="34" charset="-122"/>
                 <a:cs typeface="Calibri" pitchFamily="34" charset="-120"/>
               </a:rPr>
-              <a:t>Executing these eight recommendations positions the business for durable, margin-accretive growth</a:t>
+              <a:t>Executing these five recommendations positions the business for durable, margin-accretive growth</a:t>
             </a:r>
             <a:endParaRPr lang="en-US" sz="1200" dirty="0"/>
           </a:p>
@@ -10255,7 +10255,7 @@
                 <a:ea typeface="Georgia" pitchFamily="34" charset="-122"/>
                 <a:cs typeface="Georgia" pitchFamily="34" charset="-120"/>
               </a:rPr>
-              <a:t>+5–9pp</a:t>
+              <a:t>1,145</a:t>
             </a:r>
             <a:endParaRPr lang="en-US" sz="2800" dirty="0"/>
           </a:p>
@@ -10294,7 +10294,7 @@
                 <a:ea typeface="Calibri" pitchFamily="34" charset="-122"/>
                 <a:cs typeface="Calibri" pitchFamily="34" charset="-120"/>
               </a:rPr>
-              <a:t>Gross Margin Improvement</a:t>
+              <a:t>High-Value Discount-Independent Customers</a:t>
             </a:r>
             <a:endParaRPr lang="en-US" sz="1000" dirty="0"/>
           </a:p>
@@ -10333,7 +10333,7 @@
                 <a:ea typeface="Calibri" pitchFamily="34" charset="-122"/>
                 <a:cs typeface="Calibri" pitchFamily="34" charset="-120"/>
               </a:rPr>
-              <a:t>from removing blanket VIP discounts</a:t>
+              <a:t>identified for immediate discount pilot — zero revenue risk</a:t>
             </a:r>
             <a:endParaRPr lang="en-US" sz="900" dirty="0"/>
           </a:p>
@@ -10422,7 +10422,7 @@
                 <a:ea typeface="Georgia" pitchFamily="34" charset="-122"/>
                 <a:cs typeface="Georgia" pitchFamily="34" charset="-120"/>
               </a:rPr>
-              <a:t>2–4×</a:t>
+              <a:t>44%</a:t>
             </a:r>
             <a:endParaRPr lang="en-US" sz="2800" dirty="0"/>
           </a:p>
@@ -10461,7 +10461,7 @@
                 <a:ea typeface="Calibri" pitchFamily="34" charset="-122"/>
                 <a:cs typeface="Calibri" pitchFamily="34" charset="-120"/>
               </a:rPr>
-              <a:t>Marketing ROI</a:t>
+              <a:t>Loyal Customer Discount Rate</a:t>
             </a:r>
             <a:endParaRPr lang="en-US" sz="1000" dirty="0"/>
           </a:p>
@@ -10500,7 +10500,7 @@
                 <a:ea typeface="Calibri" pitchFamily="34" charset="-122"/>
                 <a:cs typeface="Calibri" pitchFamily="34" charset="-120"/>
               </a:rPr>
-              <a:t>through precision targeting and personalization</a:t>
+              <a:t>same rate as New customers (40%) — uniform discounting confirmed</a:t>
             </a:r>
             <a:endParaRPr lang="en-US" sz="900" dirty="0"/>
           </a:p>
@@ -10589,7 +10589,7 @@
                 <a:ea typeface="Georgia" pitchFamily="34" charset="-122"/>
                 <a:cs typeface="Georgia" pitchFamily="34" charset="-120"/>
               </a:rPr>
-              <a:t>+30%</a:t>
+              <a:t>3,900</a:t>
             </a:r>
             <a:endParaRPr lang="en-US" sz="2800" dirty="0"/>
           </a:p>
@@ -10628,7 +10628,7 @@
                 <a:ea typeface="Calibri" pitchFamily="34" charset="-122"/>
                 <a:cs typeface="Calibri" pitchFamily="34" charset="-120"/>
               </a:rPr>
-              <a:t>Customer Retention</a:t>
+              <a:t>Total Customers Analysed</a:t>
             </a:r>
             <a:endParaRPr lang="en-US" sz="1000" dirty="0"/>
           </a:p>
@@ -10667,7 +10667,7 @@
                 <a:ea typeface="Calibri" pitchFamily="34" charset="-122"/>
                 <a:cs typeface="Calibri" pitchFamily="34" charset="-120"/>
               </a:rPr>
-              <a:t>via experience-led loyalty vs. discount dependency</a:t>
+              <a:t>across New, Returning &amp; Loyal tiers — full segmentation coverage</a:t>
             </a:r>
             <a:endParaRPr lang="en-US" sz="900" dirty="0"/>
           </a:p>
@@ -10756,7 +10756,7 @@
                 <a:ea typeface="Georgia" pitchFamily="34" charset="-122"/>
                 <a:cs typeface="Georgia" pitchFamily="34" charset="-120"/>
               </a:rPr>
-              <a:t>18mo</a:t>
+              <a:t>30 Days</a:t>
             </a:r>
             <a:endParaRPr lang="en-US" sz="2800" dirty="0"/>
           </a:p>
@@ -10795,7 +10795,7 @@
                 <a:ea typeface="Calibri" pitchFamily="34" charset="-122"/>
                 <a:cs typeface="Calibri" pitchFamily="34" charset="-120"/>
               </a:rPr>
-              <a:t>Payback Period</a:t>
+              <a:t>To Pilot Launch</a:t>
             </a:r>
             <a:endParaRPr lang="en-US" sz="1000" dirty="0"/>
           </a:p>
@@ -10834,7 +10834,7 @@
                 <a:ea typeface="Calibri" pitchFamily="34" charset="-122"/>
                 <a:cs typeface="Calibri" pitchFamily="34" charset="-120"/>
               </a:rPr>
-              <a:t>on full program investment at conservative assumptions</a:t>
+              <a:t>commission pilot on Loyal/High-value cohort within 30 days</a:t>
             </a:r>
             <a:endParaRPr lang="en-US" sz="900" dirty="0"/>
           </a:p>
@@ -10898,7 +10898,7 @@
                 <a:ea typeface="Calibri" pitchFamily="34" charset="-122"/>
                 <a:cs typeface="Calibri" pitchFamily="34" charset="-120"/>
               </a:rPr>
-              <a:t>Recommended Next Step: Commission Pilot Program on VIP Cohort Within 30 Days</a:t>
+              <a:t>Recommended Next Step: Commission Pilot on Loyal/High-Value Cohort Within 30 Days  ·  Dashboard Live at streamlit.app</a:t>
             </a:r>
             <a:endParaRPr lang="en-US" sz="1050" dirty="0"/>
           </a:p>

--- a/customer_segmentation_mckinsey.pptx
+++ b/customer_segmentation_mckinsey.pptx
@@ -5232,7 +5232,7 @@
                 <a:ea typeface="Calibri" pitchFamily="34" charset="-122"/>
                 <a:cs typeface="Calibri" pitchFamily="34" charset="-120"/>
               </a:rPr>
-              <a:t xml:space="preserve">→  </a:t>
+              <a:t>→  </a:t>
             </a:r>
             <a:r>
               <a:rPr lang="en-US" sz="950" dirty="0">
@@ -5282,7 +5282,7 @@
                 <a:ea typeface="Calibri" pitchFamily="34" charset="-122"/>
                 <a:cs typeface="Calibri" pitchFamily="34" charset="-120"/>
               </a:rPr>
-              <a:t xml:space="preserve">→  </a:t>
+              <a:t>→  </a:t>
             </a:r>
             <a:r>
               <a:rPr lang="en-US" sz="950" dirty="0">
@@ -5332,7 +5332,7 @@
                 <a:ea typeface="Calibri" pitchFamily="34" charset="-122"/>
                 <a:cs typeface="Calibri" pitchFamily="34" charset="-120"/>
               </a:rPr>
-              <a:t xml:space="preserve">→  </a:t>
+              <a:t>→  </a:t>
             </a:r>
             <a:r>
               <a:rPr lang="en-US" sz="950" dirty="0">
@@ -5606,7 +5606,7 @@
                 <a:ea typeface="Calibri" pitchFamily="34" charset="-122"/>
                 <a:cs typeface="Calibri" pitchFamily="34" charset="-120"/>
               </a:rPr>
-              <a:t xml:space="preserve">→  </a:t>
+              <a:t>→  </a:t>
             </a:r>
             <a:r>
               <a:rPr lang="en-US" sz="950" dirty="0">
@@ -5656,7 +5656,7 @@
                 <a:ea typeface="Calibri" pitchFamily="34" charset="-122"/>
                 <a:cs typeface="Calibri" pitchFamily="34" charset="-120"/>
               </a:rPr>
-              <a:t xml:space="preserve">→  </a:t>
+              <a:t>→  </a:t>
             </a:r>
             <a:r>
               <a:rPr lang="en-US" sz="950" dirty="0">
@@ -5706,7 +5706,7 @@
                 <a:ea typeface="Calibri" pitchFamily="34" charset="-122"/>
                 <a:cs typeface="Calibri" pitchFamily="34" charset="-120"/>
               </a:rPr>
-              <a:t xml:space="preserve">→  </a:t>
+              <a:t>→  </a:t>
             </a:r>
             <a:r>
               <a:rPr lang="en-US" sz="950" dirty="0">
@@ -6321,7 +6321,7 @@
                 <a:ea typeface="Calibri" pitchFamily="34" charset="-122"/>
                 <a:cs typeface="Calibri" pitchFamily="34" charset="-120"/>
               </a:rPr>
-              <a:t xml:space="preserve">✓  </a:t>
+              <a:t>✓  </a:t>
             </a:r>
             <a:r>
               <a:rPr lang="en-US" sz="950" dirty="0">
@@ -6371,7 +6371,7 @@
                 <a:ea typeface="Calibri" pitchFamily="34" charset="-122"/>
                 <a:cs typeface="Calibri" pitchFamily="34" charset="-120"/>
               </a:rPr>
-              <a:t xml:space="preserve">✓  </a:t>
+              <a:t>✓  </a:t>
             </a:r>
             <a:r>
               <a:rPr lang="en-US" sz="950" dirty="0">
@@ -6421,7 +6421,7 @@
                 <a:ea typeface="Calibri" pitchFamily="34" charset="-122"/>
                 <a:cs typeface="Calibri" pitchFamily="34" charset="-120"/>
               </a:rPr>
-              <a:t xml:space="preserve">✓  </a:t>
+              <a:t>✓  </a:t>
             </a:r>
             <a:r>
               <a:rPr lang="en-US" sz="950" dirty="0">
@@ -6733,7 +6733,7 @@
                 <a:ea typeface="Calibri" pitchFamily="34" charset="-122"/>
                 <a:cs typeface="Calibri" pitchFamily="34" charset="-120"/>
               </a:rPr>
-              <a:t xml:space="preserve">✓  </a:t>
+              <a:t>✓  </a:t>
             </a:r>
             <a:r>
               <a:rPr lang="en-US" sz="950" dirty="0">
@@ -6783,7 +6783,7 @@
                 <a:ea typeface="Calibri" pitchFamily="34" charset="-122"/>
                 <a:cs typeface="Calibri" pitchFamily="34" charset="-120"/>
               </a:rPr>
-              <a:t xml:space="preserve">✓  </a:t>
+              <a:t>✓  </a:t>
             </a:r>
             <a:r>
               <a:rPr lang="en-US" sz="950" dirty="0">
@@ -6833,7 +6833,7 @@
                 <a:ea typeface="Calibri" pitchFamily="34" charset="-122"/>
                 <a:cs typeface="Calibri" pitchFamily="34" charset="-120"/>
               </a:rPr>
-              <a:t xml:space="preserve">✓  </a:t>
+              <a:t>✓  </a:t>
             </a:r>
             <a:r>
               <a:rPr lang="en-US" sz="950" dirty="0">
@@ -7145,7 +7145,7 @@
                 <a:ea typeface="Calibri" pitchFamily="34" charset="-122"/>
                 <a:cs typeface="Calibri" pitchFamily="34" charset="-120"/>
               </a:rPr>
-              <a:t xml:space="preserve">✓  </a:t>
+              <a:t>✓  </a:t>
             </a:r>
             <a:r>
               <a:rPr lang="en-US" sz="950" dirty="0">
@@ -7195,7 +7195,7 @@
                 <a:ea typeface="Calibri" pitchFamily="34" charset="-122"/>
                 <a:cs typeface="Calibri" pitchFamily="34" charset="-120"/>
               </a:rPr>
-              <a:t xml:space="preserve">✓  </a:t>
+              <a:t>✓  </a:t>
             </a:r>
             <a:r>
               <a:rPr lang="en-US" sz="950" dirty="0">
@@ -7245,7 +7245,7 @@
                 <a:ea typeface="Calibri" pitchFamily="34" charset="-122"/>
                 <a:cs typeface="Calibri" pitchFamily="34" charset="-120"/>
               </a:rPr>
-              <a:t xml:space="preserve">✓  </a:t>
+              <a:t>✓  </a:t>
             </a:r>
             <a:r>
               <a:rPr lang="en-US" sz="950" dirty="0">
@@ -9004,7 +9004,7 @@
                 <a:ea typeface="Calibri" pitchFamily="34" charset="-122"/>
                 <a:cs typeface="Calibri" pitchFamily="34" charset="-120"/>
               </a:rPr>
-              <a:t xml:space="preserve">→  </a:t>
+              <a:t>→  </a:t>
             </a:r>
             <a:r>
               <a:rPr lang="en-US" sz="900" dirty="0">
@@ -9054,7 +9054,7 @@
                 <a:ea typeface="Calibri" pitchFamily="34" charset="-122"/>
                 <a:cs typeface="Calibri" pitchFamily="34" charset="-120"/>
               </a:rPr>
-              <a:t xml:space="preserve">→  </a:t>
+              <a:t>→  </a:t>
             </a:r>
             <a:r>
               <a:rPr lang="en-US" sz="900" dirty="0">
@@ -9104,7 +9104,7 @@
                 <a:ea typeface="Calibri" pitchFamily="34" charset="-122"/>
                 <a:cs typeface="Calibri" pitchFamily="34" charset="-120"/>
               </a:rPr>
-              <a:t xml:space="preserve">→  </a:t>
+              <a:t>→  </a:t>
             </a:r>
             <a:r>
               <a:rPr lang="en-US" sz="900" dirty="0">
@@ -9179,7 +9179,7 @@
                 <a:ea typeface="Calibri" pitchFamily="34" charset="-122"/>
                 <a:cs typeface="Calibri" pitchFamily="34" charset="-120"/>
               </a:rPr>
-              <a:t>▶  Subscribers show higher avg value than non-subscribers across all tiers — subscription is the retention model that works; scale it</a:t>
+              <a:t>▶  Let discounts drive acquisition and conversion. Not retention.</a:t>
             </a:r>
             <a:endParaRPr lang="en-US" sz="850" dirty="0"/>
           </a:p>
@@ -9378,7 +9378,7 @@
                 <a:ea typeface="Calibri" pitchFamily="34" charset="-122"/>
                 <a:cs typeface="Calibri" pitchFamily="34" charset="-120"/>
               </a:rPr>
-              <a:t xml:space="preserve">→  </a:t>
+              <a:t>→  </a:t>
             </a:r>
             <a:r>
               <a:rPr lang="en-US" sz="900" dirty="0">
@@ -9428,7 +9428,7 @@
                 <a:ea typeface="Calibri" pitchFamily="34" charset="-122"/>
                 <a:cs typeface="Calibri" pitchFamily="34" charset="-120"/>
               </a:rPr>
-              <a:t xml:space="preserve">→  </a:t>
+              <a:t>→  </a:t>
             </a:r>
             <a:r>
               <a:rPr lang="en-US" sz="900" dirty="0">
@@ -9478,7 +9478,7 @@
                 <a:ea typeface="Calibri" pitchFamily="34" charset="-122"/>
                 <a:cs typeface="Calibri" pitchFamily="34" charset="-120"/>
               </a:rPr>
-              <a:t xml:space="preserve">→  </a:t>
+              <a:t>→  </a:t>
             </a:r>
             <a:r>
               <a:rPr lang="en-US" sz="900" dirty="0">
@@ -9752,7 +9752,7 @@
                 <a:ea typeface="Calibri" pitchFamily="34" charset="-122"/>
                 <a:cs typeface="Calibri" pitchFamily="34" charset="-120"/>
               </a:rPr>
-              <a:t xml:space="preserve">→  </a:t>
+              <a:t>→  </a:t>
             </a:r>
             <a:r>
               <a:rPr lang="en-US" sz="900" dirty="0">
@@ -9763,7 +9763,7 @@
                 <a:ea typeface="Calibri" pitchFamily="34" charset="-122"/>
                 <a:cs typeface="Calibri" pitchFamily="34" charset="-120"/>
               </a:rPr>
-              <a:t>Commission 90-day pilot on Loyal/High-value cohort (887 customers) — remove discounts, replace with experience perks, track retention and revenue weekly</a:t>
+              <a:t>Commission 30-day pilot on Loyal/High-value cohort (887 customers) — remove discounts, replace with experience perks, track retention and revenue weekly</a:t>
             </a:r>
             <a:endParaRPr lang="en-US" sz="900" dirty="0"/>
           </a:p>
@@ -9802,7 +9802,7 @@
                 <a:ea typeface="Calibri" pitchFamily="34" charset="-122"/>
                 <a:cs typeface="Calibri" pitchFamily="34" charset="-120"/>
               </a:rPr>
-              <a:t xml:space="preserve">→  </a:t>
+              <a:t>→  </a:t>
             </a:r>
             <a:r>
               <a:rPr lang="en-US" sz="900" dirty="0">
@@ -9852,7 +9852,7 @@
                 <a:ea typeface="Calibri" pitchFamily="34" charset="-122"/>
                 <a:cs typeface="Calibri" pitchFamily="34" charset="-120"/>
               </a:rPr>
-              <a:t xml:space="preserve">→  </a:t>
+              <a:t>→  </a:t>
             </a:r>
             <a:r>
               <a:rPr lang="en-US" sz="900" dirty="0">
